--- a/CalendarioAgo26/presentaciones/19_Modulo_re_Completo.pptx
+++ b/CalendarioAgo26/presentaciones/19_Modulo_re_Completo.pptx
@@ -178,6 +178,43 @@
 </p:presentation>
 </file>
 
+<file path=ppt/revisionInfo.xml><?xml version="1.0" encoding="utf-8"?>
+<p1510:revInfo xmlns:a="http://schemas.openxmlformats.org/drawingml/2006/main" xmlns:r="http://schemas.openxmlformats.org/officeDocument/2006/relationships" xmlns:p1510="http://schemas.microsoft.com/office/powerpoint/2015/10/main">
+  <p1510:revLst>
+    <p1510:client id="{A2DDB0E3-D4B5-4A39-AFDC-593FD3F96068}" v="1" dt="2026-08-11T16:40:50.811"/>
+  </p1510:revLst>
+</p1510:revInfo>
+</file>
+
+<file path=ppt/changesInfos/changesInfo1.xml><?xml version="1.0" encoding="utf-8"?>
+<pc:chgInfo xmlns:a="http://schemas.openxmlformats.org/drawingml/2006/main" xmlns:r="http://schemas.openxmlformats.org/officeDocument/2006/relationships" xmlns:ac="http://schemas.microsoft.com/office/drawing/2013/main/command" xmlns:pc="http://schemas.microsoft.com/office/powerpoint/2013/main/command">
+  <pc:docChgLst>
+    <pc:chgData name="Lizethe Pérez Fuertes" userId="4ae9ef87-2a7d-42f8-8dfa-0a501a9e2ff4" providerId="ADAL" clId="{FDDD45CB-1330-4033-A842-3D2746AFF7C7}"/>
+    <pc:docChg chg="modSld">
+      <pc:chgData name="Lizethe Pérez Fuertes" userId="4ae9ef87-2a7d-42f8-8dfa-0a501a9e2ff4" providerId="ADAL" clId="{FDDD45CB-1330-4033-A842-3D2746AFF7C7}" dt="2026-08-11T16:40:50.810" v="0"/>
+      <pc:docMkLst>
+        <pc:docMk/>
+      </pc:docMkLst>
+      <pc:sldChg chg="modSp">
+        <pc:chgData name="Lizethe Pérez Fuertes" userId="4ae9ef87-2a7d-42f8-8dfa-0a501a9e2ff4" providerId="ADAL" clId="{FDDD45CB-1330-4033-A842-3D2746AFF7C7}" dt="2026-08-11T16:40:50.810" v="0"/>
+        <pc:sldMkLst>
+          <pc:docMk/>
+          <pc:sldMk cId="542782376" sldId="293"/>
+        </pc:sldMkLst>
+        <pc:spChg chg="mod">
+          <ac:chgData name="Lizethe Pérez Fuertes" userId="4ae9ef87-2a7d-42f8-8dfa-0a501a9e2ff4" providerId="ADAL" clId="{FDDD45CB-1330-4033-A842-3D2746AFF7C7}" dt="2026-08-11T16:40:50.810" v="0"/>
+          <ac:spMkLst>
+            <pc:docMk/>
+            <pc:sldMk cId="542782376" sldId="293"/>
+            <ac:spMk id="2" creationId="{00000000-0000-0000-0000-000000000000}"/>
+          </ac:spMkLst>
+        </pc:spChg>
+      </pc:sldChg>
+    </pc:docChg>
+  </pc:docChgLst>
+</pc:chgInfo>
+</file>
+
 <file path=ppt/notesMasters/notesMaster1.xml><?xml version="1.0" encoding="utf-8"?>
 <p:notesMaster xmlns:a="http://schemas.openxmlformats.org/drawingml/2006/main" xmlns:r="http://schemas.openxmlformats.org/officeDocument/2006/relationships" xmlns:p="http://schemas.openxmlformats.org/presentationml/2006/main">
   <p:cSld>
@@ -260,7 +297,7 @@
           <a:p>
             <a:fld id="{DDE721D5-655F-45D2-B717-3C4CD78C8568}" type="datetimeFigureOut">
               <a:rPr lang="es-MX" smtClean="0"/>
-              <a:t>02/09/2022</a:t>
+              <a:t>11/08/2026</a:t>
             </a:fld>
             <a:endParaRPr lang="es-MX" dirty="0"/>
           </a:p>
@@ -4993,7 +5030,7 @@
           <a:p>
             <a:fld id="{B3F3E716-CACC-4490-AD07-F24B6A68DE47}" type="datetimeFigureOut">
               <a:rPr lang="es-MX" smtClean="0"/>
-              <a:t>02/09/2022</a:t>
+              <a:t>11/08/2026</a:t>
             </a:fld>
             <a:endParaRPr lang="es-MX" dirty="0"/>
           </a:p>
@@ -5163,7 +5200,7 @@
           <a:p>
             <a:fld id="{B3F3E716-CACC-4490-AD07-F24B6A68DE47}" type="datetimeFigureOut">
               <a:rPr lang="es-MX" smtClean="0"/>
-              <a:t>02/09/2022</a:t>
+              <a:t>11/08/2026</a:t>
             </a:fld>
             <a:endParaRPr lang="es-MX" dirty="0"/>
           </a:p>
@@ -5343,7 +5380,7 @@
           <a:p>
             <a:fld id="{B3F3E716-CACC-4490-AD07-F24B6A68DE47}" type="datetimeFigureOut">
               <a:rPr lang="es-MX" smtClean="0"/>
-              <a:t>02/09/2022</a:t>
+              <a:t>11/08/2026</a:t>
             </a:fld>
             <a:endParaRPr lang="es-MX" dirty="0"/>
           </a:p>
@@ -5496,7 +5533,7 @@
           <a:p>
             <a:fld id="{1D8BD707-D9CF-40AE-B4C6-C98DA3205C09}" type="datetimeFigureOut">
               <a:rPr lang="en-US" smtClean="0"/>
-              <a:t>9/2/2022</a:t>
+              <a:t>8/11/2026</a:t>
             </a:fld>
             <a:endParaRPr lang="en-US" dirty="0"/>
           </a:p>
@@ -5656,7 +5693,7 @@
           <a:p>
             <a:fld id="{B3F3E716-CACC-4490-AD07-F24B6A68DE47}" type="datetimeFigureOut">
               <a:rPr lang="es-MX" smtClean="0"/>
-              <a:t>02/09/2022</a:t>
+              <a:t>11/08/2026</a:t>
             </a:fld>
             <a:endParaRPr lang="es-MX" dirty="0"/>
           </a:p>
@@ -5902,7 +5939,7 @@
           <a:p>
             <a:fld id="{B3F3E716-CACC-4490-AD07-F24B6A68DE47}" type="datetimeFigureOut">
               <a:rPr lang="es-MX" smtClean="0"/>
-              <a:t>02/09/2022</a:t>
+              <a:t>11/08/2026</a:t>
             </a:fld>
             <a:endParaRPr lang="es-MX" dirty="0"/>
           </a:p>
@@ -6190,7 +6227,7 @@
           <a:p>
             <a:fld id="{B3F3E716-CACC-4490-AD07-F24B6A68DE47}" type="datetimeFigureOut">
               <a:rPr lang="es-MX" smtClean="0"/>
-              <a:t>02/09/2022</a:t>
+              <a:t>11/08/2026</a:t>
             </a:fld>
             <a:endParaRPr lang="es-MX" dirty="0"/>
           </a:p>
@@ -6612,7 +6649,7 @@
           <a:p>
             <a:fld id="{B3F3E716-CACC-4490-AD07-F24B6A68DE47}" type="datetimeFigureOut">
               <a:rPr lang="es-MX" smtClean="0"/>
-              <a:t>02/09/2022</a:t>
+              <a:t>11/08/2026</a:t>
             </a:fld>
             <a:endParaRPr lang="es-MX" dirty="0"/>
           </a:p>
@@ -6730,7 +6767,7 @@
           <a:p>
             <a:fld id="{B3F3E716-CACC-4490-AD07-F24B6A68DE47}" type="datetimeFigureOut">
               <a:rPr lang="es-MX" smtClean="0"/>
-              <a:t>02/09/2022</a:t>
+              <a:t>11/08/2026</a:t>
             </a:fld>
             <a:endParaRPr lang="es-MX" dirty="0"/>
           </a:p>
@@ -6825,7 +6862,7 @@
           <a:p>
             <a:fld id="{B3F3E716-CACC-4490-AD07-F24B6A68DE47}" type="datetimeFigureOut">
               <a:rPr lang="es-MX" smtClean="0"/>
-              <a:t>02/09/2022</a:t>
+              <a:t>11/08/2026</a:t>
             </a:fld>
             <a:endParaRPr lang="es-MX" dirty="0"/>
           </a:p>
@@ -7102,7 +7139,7 @@
           <a:p>
             <a:fld id="{B3F3E716-CACC-4490-AD07-F24B6A68DE47}" type="datetimeFigureOut">
               <a:rPr lang="es-MX" smtClean="0"/>
-              <a:t>02/09/2022</a:t>
+              <a:t>11/08/2026</a:t>
             </a:fld>
             <a:endParaRPr lang="es-MX" dirty="0"/>
           </a:p>
@@ -7355,7 +7392,7 @@
           <a:p>
             <a:fld id="{B3F3E716-CACC-4490-AD07-F24B6A68DE47}" type="datetimeFigureOut">
               <a:rPr lang="es-MX" smtClean="0"/>
-              <a:t>02/09/2022</a:t>
+              <a:t>11/08/2026</a:t>
             </a:fld>
             <a:endParaRPr lang="es-MX" dirty="0"/>
           </a:p>
@@ -7568,7 +7605,7 @@
           <a:p>
             <a:fld id="{B3F3E716-CACC-4490-AD07-F24B6A68DE47}" type="datetimeFigureOut">
               <a:rPr lang="es-MX" smtClean="0"/>
-              <a:t>02/09/2022</a:t>
+              <a:t>11/08/2026</a:t>
             </a:fld>
             <a:endParaRPr lang="es-MX" dirty="0"/>
           </a:p>
@@ -7966,21 +8003,18 @@
           </a:bodyPr>
           <a:lstStyle/>
           <a:p>
-            <a:pPr algn="l" eaLnBrk="1" fontAlgn="auto" hangingPunct="1">
-              <a:spcAft>
-                <a:spcPts val="0"/>
-              </a:spcAft>
+            <a:pPr algn="l">
               <a:defRPr/>
             </a:pPr>
             <a:r>
-              <a:rPr lang="es-MX" sz="3200" dirty="0">
+              <a:rPr lang="es-MX" sz="3200">
                 <a:solidFill>
                   <a:schemeClr val="bg2">
                     <a:lumMod val="50000"/>
                   </a:schemeClr>
                 </a:solidFill>
               </a:rPr>
-              <a:t>TI 3001 C</a:t>
+              <a:t>TI 3008 C</a:t>
             </a:r>
             <a:br>
               <a:rPr lang="es-MX" sz="3200" dirty="0">
